--- a/slides/lschub-historic.pptx
+++ b/slides/lschub-historic.pptx
@@ -3152,8 +3152,6 @@
             <a:pPr lvl="0" indent="0" marL="0">
               <a:buNone/>
             </a:pPr>
-            <a:br/>
-            <a:br/>
             <a:r>
               <a:rPr/>
               <a:t>van Genuchten, P; van der Woude, T;</a:t>
